--- a/핏콜라보/261026/메가MGC커피_앱카드_API연동흐름정의서_v0_2_261026_4.pptx
+++ b/핏콜라보/261026/메가MGC커피_앱카드_API연동흐름정의서_v0_2_261026_4.pptx
@@ -2845,7 +2845,7 @@
         </p:nvGraphicFramePr>
         <p:xfrm>
           <a:off x="548640" y="1691640"/>
-          <a:ext cx="11091672" cy="4192523"/>
+          <a:ext cx="11091672" cy="4299579"/>
         </p:xfrm>
         <a:graphic>
           <a:graphicData uri="http://schemas.openxmlformats.org/drawingml/2006/table">
@@ -3131,7 +3131,7 @@
                   </a:tcPr>
                 </a:tc>
               </a:tr>
-              <a:tr h="429768">
+              <a:tr h="438149">
                 <a:tc>
                   <a:txBody>
                     <a:bodyPr/>
@@ -3452,7 +3452,7 @@
                   </a:tcPr>
                 </a:tc>
               </a:tr>
-              <a:tr h="429768">
+              <a:tr h="438149">
                 <a:tc>
                   <a:txBody>
                     <a:bodyPr/>
@@ -3756,7 +3756,7 @@
                   </a:tcPr>
                 </a:tc>
               </a:tr>
-              <a:tr h="429768">
+              <a:tr h="438149">
                 <a:tc>
                   <a:txBody>
                     <a:bodyPr/>
@@ -4039,7 +4039,7 @@
                   </a:tcPr>
                 </a:tc>
               </a:tr>
-              <a:tr h="589787">
+              <a:tr h="611505">
                 <a:tc>
                   <a:txBody>
                     <a:bodyPr/>
@@ -4343,7 +4343,7 @@
                   </a:tcPr>
                 </a:tc>
               </a:tr>
-              <a:tr h="429768">
+              <a:tr h="438149">
                 <a:tc>
                   <a:txBody>
                     <a:bodyPr/>
@@ -4626,7 +4626,7 @@
                   </a:tcPr>
                 </a:tc>
               </a:tr>
-              <a:tr h="749808">
+              <a:tr h="784860">
                 <a:tc>
                   <a:txBody>
                     <a:bodyPr/>
@@ -4951,7 +4951,7 @@
                   </a:tcPr>
                 </a:tc>
               </a:tr>
-              <a:tr h="429768">
+              <a:tr h="438149">
                 <a:tc>
                   <a:txBody>
                     <a:bodyPr/>
@@ -5234,7 +5234,7 @@
                   </a:tcPr>
                 </a:tc>
               </a:tr>
-              <a:tr h="429768">
+              <a:tr h="438149">
                 <a:tc>
                   <a:txBody>
                     <a:bodyPr/>
